--- a/Foundation_F3/Workshop/F3-W02_Apply_Workshop_L03-L04_A_Video_Tour_of_My_Home.pptx
+++ b/Foundation_F3/Workshop/F3-W02_Apply_Workshop_L03-L04_A_Video_Tour_of_My_Home.pptx
@@ -7436,7 +7436,7 @@
                 <a:latin typeface="Calibri" pitchFamily="34" charset="0"/>
                 <a:cs typeface="Amiri" pitchFamily="2" charset="-78"/>
               </a:rPr>
-              <a:t>Odd numbers come from F3-L03, even numbers from F3-L04. Core: a full sentence from the starter. Develop: add the “more” part. Stretch: link two answers with </a:t>
+              <a:t>Odd numbers come from F3-L03, even numbers from F3-L04. Core: a full sentence from the starter. Develop: add the “more” part. Stretch: link two answers with ‏</a:t>
             </a:r>
             <a:pPr algn="l" indent="0" marL="0">
               <a:buNone/>
@@ -7463,7 +7463,7 @@
                 <a:latin typeface="Calibri" pitchFamily="34" charset="0"/>
                 <a:cs typeface="Amiri" pitchFamily="2" charset="-78"/>
               </a:rPr>
-              <a:t>, </a:t>
+              <a:t>‏, ‏</a:t>
             </a:r>
             <a:pPr algn="l" indent="0" marL="0">
               <a:buNone/>
@@ -7490,7 +7490,7 @@
                 <a:latin typeface="Calibri" pitchFamily="34" charset="0"/>
                 <a:cs typeface="Amiri" pitchFamily="2" charset="-78"/>
               </a:rPr>
-              <a:t> or </a:t>
+              <a:t>‏ or ‏</a:t>
             </a:r>
             <a:pPr algn="l" indent="0" marL="0">
               <a:buNone/>
@@ -7517,7 +7517,7 @@
                 <a:latin typeface="Calibri" pitchFamily="34" charset="0"/>
                 <a:cs typeface="Amiri" pitchFamily="2" charset="-78"/>
               </a:rPr>
-              <a:t>. Swap after each question.</a:t>
+              <a:t>‏. Swap after each question.</a:t>
             </a:r>
             <a:endParaRPr lang="en-US" sz="1100" dirty="0"/>
           </a:p>
@@ -8783,7 +8783,7 @@
                 <a:latin typeface="Calibri" pitchFamily="34" charset="0"/>
                 <a:cs typeface="Amiri" pitchFamily="2" charset="-78"/>
               </a:rPr>
-              <a:t>Name two items with </a:t>
+              <a:t>Name two items with ‏</a:t>
             </a:r>
             <a:pPr algn="l" indent="0" marL="0">
               <a:buNone/>
@@ -8810,7 +8810,7 @@
                 <a:latin typeface="Calibri" pitchFamily="34" charset="0"/>
                 <a:cs typeface="Amiri" pitchFamily="2" charset="-78"/>
               </a:rPr>
-              <a:t>.</a:t>
+              <a:t>‏.</a:t>
             </a:r>
             <a:endParaRPr lang="en-US" sz="1100" dirty="0"/>
           </a:p>
@@ -10867,7 +10867,7 @@
                 <a:latin typeface="Calibri" pitchFamily="34" charset="0"/>
                 <a:cs typeface="Amiri" pitchFamily="2" charset="-78"/>
               </a:rPr>
-              <a:t>Use </a:t>
+              <a:t>Use ‏</a:t>
             </a:r>
             <a:pPr algn="l" indent="0" marL="0">
               <a:buNone/>
@@ -10894,7 +10894,7 @@
                 <a:latin typeface="Calibri" pitchFamily="34" charset="0"/>
                 <a:cs typeface="Amiri" pitchFamily="2" charset="-78"/>
               </a:rPr>
-              <a:t> and one position: </a:t>
+              <a:t>‏ and one position: ‏</a:t>
             </a:r>
             <a:pPr algn="l" indent="0" marL="0">
               <a:buNone/>
@@ -11002,7 +11002,7 @@
                 <a:latin typeface="Calibri" pitchFamily="34" charset="0"/>
                 <a:cs typeface="Amiri" pitchFamily="2" charset="-78"/>
               </a:rPr>
-              <a:t>.</a:t>
+              <a:t>‏.</a:t>
             </a:r>
             <a:endParaRPr lang="en-US" sz="1150" dirty="0"/>
           </a:p>
@@ -11139,7 +11139,7 @@
                 <a:latin typeface="Calibri" pitchFamily="34" charset="0"/>
                 <a:cs typeface="Amiri" pitchFamily="2" charset="-78"/>
               </a:rPr>
-              <a:t>Add floors (</a:t>
+              <a:t>Add floors (‏</a:t>
             </a:r>
             <a:pPr algn="l" indent="0" marL="0">
               <a:buNone/>
@@ -11166,7 +11166,7 @@
                 <a:latin typeface="Calibri" pitchFamily="34" charset="0"/>
                 <a:cs typeface="Amiri" pitchFamily="2" charset="-78"/>
               </a:rPr>
-              <a:t> …) and a reason for your favourite room.</a:t>
+              <a:t> …‏) and a reason for your favourite room.</a:t>
             </a:r>
             <a:endParaRPr lang="en-US" sz="1150" dirty="0"/>
           </a:p>
@@ -17596,7 +17596,7 @@
                 <a:latin typeface="Calibri" pitchFamily="34" charset="0"/>
                 <a:cs typeface="Amiri" pitchFamily="2" charset="-78"/>
               </a:rPr>
-              <a:t>The room is feminine → </a:t>
+              <a:t>The room is feminine → ‏</a:t>
             </a:r>
             <a:pPr algn="l" indent="0" marL="0">
               <a:buNone/>
@@ -17623,7 +17623,7 @@
                 <a:latin typeface="Calibri" pitchFamily="34" charset="0"/>
                 <a:cs typeface="Amiri" pitchFamily="2" charset="-78"/>
               </a:rPr>
-              <a:t>.</a:t>
+              <a:t>‏.</a:t>
             </a:r>
             <a:endParaRPr lang="en-US" sz="1150" dirty="0"/>
           </a:p>
@@ -17834,7 +17834,7 @@
                 <a:latin typeface="Calibri" pitchFamily="34" charset="0"/>
                 <a:cs typeface="Amiri" pitchFamily="2" charset="-78"/>
               </a:rPr>
-              <a:t>Feminine item → </a:t>
+              <a:t>Feminine item → ‏</a:t>
             </a:r>
             <a:pPr algn="l" indent="0" marL="0">
               <a:buNone/>
@@ -17861,7 +17861,7 @@
                 <a:latin typeface="Calibri" pitchFamily="34" charset="0"/>
                 <a:cs typeface="Amiri" pitchFamily="2" charset="-78"/>
               </a:rPr>
-              <a:t>.</a:t>
+              <a:t>‏.</a:t>
             </a:r>
             <a:endParaRPr lang="en-US" sz="1150" dirty="0"/>
           </a:p>
@@ -18072,7 +18072,7 @@
                 <a:latin typeface="Calibri" pitchFamily="34" charset="0"/>
                 <a:cs typeface="Amiri" pitchFamily="2" charset="-78"/>
               </a:rPr>
-              <a:t>After 3–10 use the plural: </a:t>
+              <a:t>After 3–10 use the plural: ‏</a:t>
             </a:r>
             <a:pPr algn="l" indent="0" marL="0">
               <a:buNone/>
@@ -18099,7 +18099,7 @@
                 <a:latin typeface="Calibri" pitchFamily="34" charset="0"/>
                 <a:cs typeface="Amiri" pitchFamily="2" charset="-78"/>
               </a:rPr>
-              <a:t>.</a:t>
+              <a:t>‏.</a:t>
             </a:r>
             <a:endParaRPr lang="en-US" sz="1150" dirty="0"/>
           </a:p>
@@ -20147,7 +20147,7 @@
                 <a:latin typeface="Calibri" pitchFamily="34" charset="0"/>
                 <a:cs typeface="Amiri" pitchFamily="2" charset="-78"/>
               </a:rPr>
-              <a:t>Write the script for a short video tour of your home (about 45–65 words). Include: • house or flat, and where • the rooms on each floor • four items in two rooms with </a:t>
+              <a:t>Write the script for a short video tour of your home (about 45–65 words). Include: • house or flat, and where • the rooms on each floor • four items in two rooms with ‏</a:t>
             </a:r>
             <a:pPr algn="l" indent="0" marL="0">
               <a:buNone/>
@@ -20174,7 +20174,7 @@
                 <a:latin typeface="Calibri" pitchFamily="34" charset="0"/>
                 <a:cs typeface="Amiri" pitchFamily="2" charset="-78"/>
               </a:rPr>
-              <a:t> • where two items are • your favourite room and why.</a:t>
+              <a:t>‏ • where two items are • your favourite room and why.</a:t>
             </a:r>
             <a:endParaRPr lang="en-US" sz="1350" dirty="0"/>
           </a:p>
@@ -20326,7 +20326,7 @@
                 <a:latin typeface="Calibri" pitchFamily="34" charset="0"/>
                 <a:cs typeface="Amiri" pitchFamily="2" charset="-78"/>
               </a:rPr>
-              <a:t>☐  At least one </a:t>
+              <a:t>☐  At least one ‏</a:t>
             </a:r>
             <a:pPr algn="l" indent="0" marL="0">
               <a:buNone/>
@@ -20353,7 +20353,7 @@
                 <a:latin typeface="Calibri" pitchFamily="34" charset="0"/>
                 <a:cs typeface="Amiri" pitchFamily="2" charset="-78"/>
               </a:rPr>
-              <a:t> and one </a:t>
+              <a:t>‏ and one ‏</a:t>
             </a:r>
             <a:pPr algn="l" indent="0" marL="0">
               <a:buNone/>
@@ -20380,7 +20380,7 @@
                 <a:latin typeface="Calibri" pitchFamily="34" charset="0"/>
                 <a:cs typeface="Amiri" pitchFamily="2" charset="-78"/>
               </a:rPr>
-              <a:t> (Develop).</a:t>
+              <a:t>‏ (Develop).</a:t>
             </a:r>
             <a:endParaRPr lang="en-US" sz="1200" dirty="0"/>
           </a:p>
@@ -23928,7 +23928,7 @@
                 <a:latin typeface="Calibri" pitchFamily="34" charset="0"/>
                 <a:cs typeface="Amiri" pitchFamily="2" charset="-78"/>
               </a:rPr>
-              <a:t>give positions with the genitive (</a:t>
+              <a:t>give positions with the genitive (‏</a:t>
             </a:r>
             <a:pPr algn="l" indent="0" marL="0">
               <a:buNone/>
@@ -23955,7 +23955,7 @@
                 <a:latin typeface="Calibri" pitchFamily="34" charset="0"/>
                 <a:cs typeface="Amiri" pitchFamily="2" charset="-78"/>
               </a:rPr>
-              <a:t>)?</a:t>
+              <a:t>‏)?</a:t>
             </a:r>
             <a:endParaRPr lang="en-US" sz="1100" dirty="0"/>
           </a:p>
@@ -24114,7 +24114,7 @@
                 <a:latin typeface="Calibri" pitchFamily="34" charset="0"/>
                 <a:cs typeface="Amiri" pitchFamily="2" charset="-78"/>
               </a:rPr>
-              <a:t>use linking words (</a:t>
+              <a:t>use linking words (‏</a:t>
             </a:r>
             <a:pPr algn="l" indent="0" marL="0">
               <a:buNone/>
@@ -24222,7 +24222,7 @@
                 <a:latin typeface="Calibri" pitchFamily="34" charset="0"/>
                 <a:cs typeface="Amiri" pitchFamily="2" charset="-78"/>
               </a:rPr>
-              <a:t>)?</a:t>
+              <a:t>‏)?</a:t>
             </a:r>
             <a:endParaRPr lang="en-US" sz="1100" dirty="0"/>
           </a:p>
@@ -28168,7 +28168,7 @@
                 <a:latin typeface="Calibri" pitchFamily="34" charset="0"/>
                 <a:cs typeface="Amiri" pitchFamily="2" charset="-78"/>
               </a:rPr>
-              <a:t>I added reasons (</a:t>
+              <a:t>I added reasons (‏</a:t>
             </a:r>
             <a:pPr algn="l" indent="0" marL="0">
               <a:buNone/>
@@ -28195,7 +28195,7 @@
                 <a:latin typeface="Calibri" pitchFamily="34" charset="0"/>
                 <a:cs typeface="Amiri" pitchFamily="2" charset="-78"/>
               </a:rPr>
-              <a:t>) and extra details without frames.</a:t>
+              <a:t>‏) and extra details without frames.</a:t>
             </a:r>
             <a:endParaRPr lang="en-US" sz="1300" dirty="0"/>
           </a:p>
@@ -32323,7 +32323,7 @@
                 <a:latin typeface="Calibri" pitchFamily="34" charset="0"/>
                 <a:cs typeface="Amiri" pitchFamily="2" charset="-78"/>
               </a:rPr>
-              <a:t>☐  Add a reason (</a:t>
+              <a:t>☐  Add a reason (‏</a:t>
             </a:r>
             <a:pPr algn="l" indent="0" marL="0">
               <a:buNone/>
@@ -32350,7 +32350,7 @@
                 <a:latin typeface="Calibri" pitchFamily="34" charset="0"/>
                 <a:cs typeface="Amiri" pitchFamily="2" charset="-78"/>
               </a:rPr>
-              <a:t>) and an extra detail to every point.</a:t>
+              <a:t>‏) and an extra detail to every point.</a:t>
             </a:r>
             <a:endParaRPr lang="en-US" sz="1300" dirty="0"/>
           </a:p>
@@ -33871,7 +33871,7 @@
                 <a:latin typeface="Calibri" pitchFamily="34" charset="0"/>
                 <a:cs typeface="Amiri" pitchFamily="2" charset="-78"/>
               </a:rPr>
-              <a:t>Join a word from each lesson in one sentence with </a:t>
+              <a:t>Join a word from each lesson in one sentence with ‏</a:t>
             </a:r>
             <a:pPr algn="l" indent="0" marL="0">
               <a:buNone/>
@@ -33898,7 +33898,7 @@
                 <a:latin typeface="Calibri" pitchFamily="34" charset="0"/>
                 <a:cs typeface="Amiri" pitchFamily="2" charset="-78"/>
               </a:rPr>
-              <a:t> or </a:t>
+              <a:t>‏ or ‏</a:t>
             </a:r>
             <a:pPr algn="l" indent="0" marL="0">
               <a:buNone/>
@@ -33925,7 +33925,7 @@
                 <a:latin typeface="Calibri" pitchFamily="34" charset="0"/>
                 <a:cs typeface="Amiri" pitchFamily="2" charset="-78"/>
               </a:rPr>
-              <a:t>.</a:t>
+              <a:t>‏.</a:t>
             </a:r>
             <a:endParaRPr lang="en-US" sz="1150" dirty="0"/>
           </a:p>
@@ -36402,7 +36402,7 @@
                 <a:latin typeface="Calibri" pitchFamily="34" charset="0"/>
                 <a:cs typeface="Amiri" pitchFamily="2" charset="-78"/>
               </a:rPr>
-              <a:t>Do not confuse (website): </a:t>
+              <a:t>Do not confuse (website): ‏</a:t>
             </a:r>
             <a:pPr algn="l" indent="0" marL="0">
               <a:buNone/>
@@ -36429,7 +36429,7 @@
                 <a:latin typeface="Calibri" pitchFamily="34" charset="0"/>
                 <a:cs typeface="Amiri" pitchFamily="2" charset="-78"/>
               </a:rPr>
-              <a:t> = ceiling / roof covering; </a:t>
+              <a:t>‏ = ceiling / roof covering; ‏</a:t>
             </a:r>
             <a:pPr algn="l" indent="0" marL="0">
               <a:buNone/>
@@ -36456,7 +36456,7 @@
                 <a:latin typeface="Calibri" pitchFamily="34" charset="0"/>
                 <a:cs typeface="Amiri" pitchFamily="2" charset="-78"/>
               </a:rPr>
-              <a:t> = flat rooftop.</a:t>
+              <a:t>‏ = flat rooftop.</a:t>
             </a:r>
             <a:endParaRPr lang="en-US" sz="900" dirty="0"/>
           </a:p>
